--- a/public/videos/repositories/hotel-price-watch/hotel-price-watch-tech-preview.pptx
+++ b/public/videos/repositories/hotel-price-watch/hotel-price-watch-tech-preview.pptx
@@ -134,7 +134,7 @@
           <p:cNvPr id="2" name="タイトル 1">
             <a:extLst>
               <a:ext uri="{FF2B5EF4-FFF2-40B4-BE49-F238E27FC236}">
-                <a16:creationId xmlns:a16="http://schemas.microsoft.com/office/drawing/2014/main" id="{85F1F75A-D90A-D2E1-DF39-2063E2E41010}"/>
+                <a16:creationId xmlns:a16="http://schemas.microsoft.com/office/drawing/2014/main" id="{97C6E10A-C51B-7FB9-DC0C-FC86C5FFC316}"/>
               </a:ext>
             </a:extLst>
           </p:cNvPr>
@@ -171,7 +171,7 @@
           <p:cNvPr id="3" name="字幕 2">
             <a:extLst>
               <a:ext uri="{FF2B5EF4-FFF2-40B4-BE49-F238E27FC236}">
-                <a16:creationId xmlns:a16="http://schemas.microsoft.com/office/drawing/2014/main" id="{8C58DE4F-226D-DB90-0B2A-D791EB8E55EA}"/>
+                <a16:creationId xmlns:a16="http://schemas.microsoft.com/office/drawing/2014/main" id="{A2795DF6-7BB5-2705-B63D-E2F7455A1039}"/>
               </a:ext>
             </a:extLst>
           </p:cNvPr>
@@ -241,7 +241,7 @@
           <p:cNvPr id="4" name="日付プレースホルダー 3">
             <a:extLst>
               <a:ext uri="{FF2B5EF4-FFF2-40B4-BE49-F238E27FC236}">
-                <a16:creationId xmlns:a16="http://schemas.microsoft.com/office/drawing/2014/main" id="{FF8B1319-DB10-B356-31B9-108000414773}"/>
+                <a16:creationId xmlns:a16="http://schemas.microsoft.com/office/drawing/2014/main" id="{2F3BB615-AC7C-F679-5DDA-F6DF31B52ECA}"/>
               </a:ext>
             </a:extLst>
           </p:cNvPr>
@@ -257,7 +257,7 @@
           <a:bodyPr/>
           <a:lstStyle/>
           <a:p>
-            <a:fld id="{4FC949B2-5982-463B-940B-304794D3D9C4}" type="datetimeFigureOut">
+            <a:fld id="{1708F33B-46DE-4359-9CC4-E2923593AE9C}" type="datetimeFigureOut">
               <a:rPr kumimoji="1" lang="ja-JP" altLang="en-US" smtClean="0"/>
               <a:t>2026/7/30</a:t>
             </a:fld>
@@ -270,7 +270,7 @@
           <p:cNvPr id="5" name="フッター プレースホルダー 4">
             <a:extLst>
               <a:ext uri="{FF2B5EF4-FFF2-40B4-BE49-F238E27FC236}">
-                <a16:creationId xmlns:a16="http://schemas.microsoft.com/office/drawing/2014/main" id="{BC527590-DF2C-269D-AA0D-D08C751D5FC3}"/>
+                <a16:creationId xmlns:a16="http://schemas.microsoft.com/office/drawing/2014/main" id="{5E9A52A9-229C-9F30-68FA-C0DF0BB1113C}"/>
               </a:ext>
             </a:extLst>
           </p:cNvPr>
@@ -295,7 +295,7 @@
           <p:cNvPr id="6" name="スライド番号プレースホルダー 5">
             <a:extLst>
               <a:ext uri="{FF2B5EF4-FFF2-40B4-BE49-F238E27FC236}">
-                <a16:creationId xmlns:a16="http://schemas.microsoft.com/office/drawing/2014/main" id="{47C6EF43-B0D5-1080-A811-80A53E4367B0}"/>
+                <a16:creationId xmlns:a16="http://schemas.microsoft.com/office/drawing/2014/main" id="{F27E2879-E04F-83CF-6F51-8E8A8A6A00FE}"/>
               </a:ext>
             </a:extLst>
           </p:cNvPr>
@@ -311,7 +311,7 @@
           <a:bodyPr/>
           <a:lstStyle/>
           <a:p>
-            <a:fld id="{3DA16184-EAAA-43A8-BE9C-AFF73D622F91}" type="slidenum">
+            <a:fld id="{BD425EC5-D5F1-46D1-A997-BE69968BA014}" type="slidenum">
               <a:rPr kumimoji="1" lang="ja-JP" altLang="en-US" smtClean="0"/>
               <a:t>‹#›</a:t>
             </a:fld>
@@ -322,7 +322,7 @@
     </p:spTree>
     <p:extLst>
       <p:ext uri="{BB962C8B-B14F-4D97-AF65-F5344CB8AC3E}">
-        <p14:creationId xmlns:p14="http://schemas.microsoft.com/office/powerpoint/2010/main" val="1840364136"/>
+        <p14:creationId xmlns:p14="http://schemas.microsoft.com/office/powerpoint/2010/main" val="3058663935"/>
       </p:ext>
     </p:extLst>
   </p:cSld>
@@ -354,7 +354,7 @@
           <p:cNvPr id="2" name="タイトル 1">
             <a:extLst>
               <a:ext uri="{FF2B5EF4-FFF2-40B4-BE49-F238E27FC236}">
-                <a16:creationId xmlns:a16="http://schemas.microsoft.com/office/drawing/2014/main" id="{DE9CA4EB-E900-EAFB-9C49-FB4769F79F9E}"/>
+                <a16:creationId xmlns:a16="http://schemas.microsoft.com/office/drawing/2014/main" id="{1B67F6B0-407B-788D-B7A1-B6F075B79B70}"/>
               </a:ext>
             </a:extLst>
           </p:cNvPr>
@@ -382,7 +382,7 @@
           <p:cNvPr id="3" name="縦書きテキスト プレースホルダー 2">
             <a:extLst>
               <a:ext uri="{FF2B5EF4-FFF2-40B4-BE49-F238E27FC236}">
-                <a16:creationId xmlns:a16="http://schemas.microsoft.com/office/drawing/2014/main" id="{58F46837-FEF5-9986-8C3F-AF755CBC6D23}"/>
+                <a16:creationId xmlns:a16="http://schemas.microsoft.com/office/drawing/2014/main" id="{FC5ADB27-D07D-A768-AAF6-EFD403907B01}"/>
               </a:ext>
             </a:extLst>
           </p:cNvPr>
@@ -471,7 +471,7 @@
           <p:cNvPr id="4" name="日付プレースホルダー 3">
             <a:extLst>
               <a:ext uri="{FF2B5EF4-FFF2-40B4-BE49-F238E27FC236}">
-                <a16:creationId xmlns:a16="http://schemas.microsoft.com/office/drawing/2014/main" id="{C0892158-CEF3-0D8B-9132-7B79796D6B04}"/>
+                <a16:creationId xmlns:a16="http://schemas.microsoft.com/office/drawing/2014/main" id="{206EE4A4-BD0B-B43E-DA25-3906E0074A39}"/>
               </a:ext>
             </a:extLst>
           </p:cNvPr>
@@ -487,7 +487,7 @@
           <a:bodyPr/>
           <a:lstStyle/>
           <a:p>
-            <a:fld id="{4FC949B2-5982-463B-940B-304794D3D9C4}" type="datetimeFigureOut">
+            <a:fld id="{1708F33B-46DE-4359-9CC4-E2923593AE9C}" type="datetimeFigureOut">
               <a:rPr kumimoji="1" lang="ja-JP" altLang="en-US" smtClean="0"/>
               <a:t>2026/7/30</a:t>
             </a:fld>
@@ -500,7 +500,7 @@
           <p:cNvPr id="5" name="フッター プレースホルダー 4">
             <a:extLst>
               <a:ext uri="{FF2B5EF4-FFF2-40B4-BE49-F238E27FC236}">
-                <a16:creationId xmlns:a16="http://schemas.microsoft.com/office/drawing/2014/main" id="{75BC172D-9E29-2C07-3F6D-A557F8630A3E}"/>
+                <a16:creationId xmlns:a16="http://schemas.microsoft.com/office/drawing/2014/main" id="{FC98904F-50B6-32C4-4F67-E72690C6A6DD}"/>
               </a:ext>
             </a:extLst>
           </p:cNvPr>
@@ -525,7 +525,7 @@
           <p:cNvPr id="6" name="スライド番号プレースホルダー 5">
             <a:extLst>
               <a:ext uri="{FF2B5EF4-FFF2-40B4-BE49-F238E27FC236}">
-                <a16:creationId xmlns:a16="http://schemas.microsoft.com/office/drawing/2014/main" id="{C51FBC39-EE08-FFB4-DED0-3AFB30A6E75F}"/>
+                <a16:creationId xmlns:a16="http://schemas.microsoft.com/office/drawing/2014/main" id="{020162DF-A624-D695-4C90-6F4DC70D8BD1}"/>
               </a:ext>
             </a:extLst>
           </p:cNvPr>
@@ -541,7 +541,7 @@
           <a:bodyPr/>
           <a:lstStyle/>
           <a:p>
-            <a:fld id="{3DA16184-EAAA-43A8-BE9C-AFF73D622F91}" type="slidenum">
+            <a:fld id="{BD425EC5-D5F1-46D1-A997-BE69968BA014}" type="slidenum">
               <a:rPr kumimoji="1" lang="ja-JP" altLang="en-US" smtClean="0"/>
               <a:t>‹#›</a:t>
             </a:fld>
@@ -552,7 +552,7 @@
     </p:spTree>
     <p:extLst>
       <p:ext uri="{BB962C8B-B14F-4D97-AF65-F5344CB8AC3E}">
-        <p14:creationId xmlns:p14="http://schemas.microsoft.com/office/powerpoint/2010/main" val="1429235361"/>
+        <p14:creationId xmlns:p14="http://schemas.microsoft.com/office/powerpoint/2010/main" val="3516537400"/>
       </p:ext>
     </p:extLst>
   </p:cSld>
@@ -584,7 +584,7 @@
           <p:cNvPr id="2" name="縦書きタイトル 1">
             <a:extLst>
               <a:ext uri="{FF2B5EF4-FFF2-40B4-BE49-F238E27FC236}">
-                <a16:creationId xmlns:a16="http://schemas.microsoft.com/office/drawing/2014/main" id="{1EAB3758-1612-ECF6-87E8-2170EC166E6F}"/>
+                <a16:creationId xmlns:a16="http://schemas.microsoft.com/office/drawing/2014/main" id="{C48E2B09-E9F4-327A-EA2E-887108E88F95}"/>
               </a:ext>
             </a:extLst>
           </p:cNvPr>
@@ -617,7 +617,7 @@
           <p:cNvPr id="3" name="縦書きテキスト プレースホルダー 2">
             <a:extLst>
               <a:ext uri="{FF2B5EF4-FFF2-40B4-BE49-F238E27FC236}">
-                <a16:creationId xmlns:a16="http://schemas.microsoft.com/office/drawing/2014/main" id="{FE777014-C8AD-A468-B99C-59CF946BDB15}"/>
+                <a16:creationId xmlns:a16="http://schemas.microsoft.com/office/drawing/2014/main" id="{B00DADA3-FBDA-4ACD-DF0E-ACB42810AE6F}"/>
               </a:ext>
             </a:extLst>
           </p:cNvPr>
@@ -711,7 +711,7 @@
           <p:cNvPr id="4" name="日付プレースホルダー 3">
             <a:extLst>
               <a:ext uri="{FF2B5EF4-FFF2-40B4-BE49-F238E27FC236}">
-                <a16:creationId xmlns:a16="http://schemas.microsoft.com/office/drawing/2014/main" id="{A92E520F-87AD-8C8C-414F-FF0A5B73EC58}"/>
+                <a16:creationId xmlns:a16="http://schemas.microsoft.com/office/drawing/2014/main" id="{0AFA965A-CD11-0CDF-D420-02C8B204071B}"/>
               </a:ext>
             </a:extLst>
           </p:cNvPr>
@@ -727,7 +727,7 @@
           <a:bodyPr/>
           <a:lstStyle/>
           <a:p>
-            <a:fld id="{4FC949B2-5982-463B-940B-304794D3D9C4}" type="datetimeFigureOut">
+            <a:fld id="{1708F33B-46DE-4359-9CC4-E2923593AE9C}" type="datetimeFigureOut">
               <a:rPr kumimoji="1" lang="ja-JP" altLang="en-US" smtClean="0"/>
               <a:t>2026/7/30</a:t>
             </a:fld>
@@ -740,7 +740,7 @@
           <p:cNvPr id="5" name="フッター プレースホルダー 4">
             <a:extLst>
               <a:ext uri="{FF2B5EF4-FFF2-40B4-BE49-F238E27FC236}">
-                <a16:creationId xmlns:a16="http://schemas.microsoft.com/office/drawing/2014/main" id="{07D17E61-A100-9C09-CCBA-083A4C4B9ABD}"/>
+                <a16:creationId xmlns:a16="http://schemas.microsoft.com/office/drawing/2014/main" id="{A1D3C8EA-4D15-C61B-5FA0-325A63F3DFF9}"/>
               </a:ext>
             </a:extLst>
           </p:cNvPr>
@@ -765,7 +765,7 @@
           <p:cNvPr id="6" name="スライド番号プレースホルダー 5">
             <a:extLst>
               <a:ext uri="{FF2B5EF4-FFF2-40B4-BE49-F238E27FC236}">
-                <a16:creationId xmlns:a16="http://schemas.microsoft.com/office/drawing/2014/main" id="{E115B65F-3C57-ACA3-F1FF-C325D83333BC}"/>
+                <a16:creationId xmlns:a16="http://schemas.microsoft.com/office/drawing/2014/main" id="{D8222B32-B9C9-E77C-0449-6169DBBA8682}"/>
               </a:ext>
             </a:extLst>
           </p:cNvPr>
@@ -781,7 +781,7 @@
           <a:bodyPr/>
           <a:lstStyle/>
           <a:p>
-            <a:fld id="{3DA16184-EAAA-43A8-BE9C-AFF73D622F91}" type="slidenum">
+            <a:fld id="{BD425EC5-D5F1-46D1-A997-BE69968BA014}" type="slidenum">
               <a:rPr kumimoji="1" lang="ja-JP" altLang="en-US" smtClean="0"/>
               <a:t>‹#›</a:t>
             </a:fld>
@@ -792,7 +792,7 @@
     </p:spTree>
     <p:extLst>
       <p:ext uri="{BB962C8B-B14F-4D97-AF65-F5344CB8AC3E}">
-        <p14:creationId xmlns:p14="http://schemas.microsoft.com/office/powerpoint/2010/main" val="4127523755"/>
+        <p14:creationId xmlns:p14="http://schemas.microsoft.com/office/powerpoint/2010/main" val="433908181"/>
       </p:ext>
     </p:extLst>
   </p:cSld>
@@ -824,7 +824,7 @@
           <p:cNvPr id="2" name="タイトル 1">
             <a:extLst>
               <a:ext uri="{FF2B5EF4-FFF2-40B4-BE49-F238E27FC236}">
-                <a16:creationId xmlns:a16="http://schemas.microsoft.com/office/drawing/2014/main" id="{7FA71B43-3FC8-B12B-58A7-6F1A6DC3C3A8}"/>
+                <a16:creationId xmlns:a16="http://schemas.microsoft.com/office/drawing/2014/main" id="{344EA745-EE4C-0AF5-7D8D-66A57479A673}"/>
               </a:ext>
             </a:extLst>
           </p:cNvPr>
@@ -852,7 +852,7 @@
           <p:cNvPr id="3" name="コンテンツ プレースホルダー 2">
             <a:extLst>
               <a:ext uri="{FF2B5EF4-FFF2-40B4-BE49-F238E27FC236}">
-                <a16:creationId xmlns:a16="http://schemas.microsoft.com/office/drawing/2014/main" id="{B5BE3B7D-9EB8-C700-E0F0-E01C5705FC05}"/>
+                <a16:creationId xmlns:a16="http://schemas.microsoft.com/office/drawing/2014/main" id="{600371D2-23FD-ADD1-0BBF-11C8A827CE72}"/>
               </a:ext>
             </a:extLst>
           </p:cNvPr>
@@ -941,7 +941,7 @@
           <p:cNvPr id="4" name="日付プレースホルダー 3">
             <a:extLst>
               <a:ext uri="{FF2B5EF4-FFF2-40B4-BE49-F238E27FC236}">
-                <a16:creationId xmlns:a16="http://schemas.microsoft.com/office/drawing/2014/main" id="{467332E2-2DD5-FAD7-474F-916DDC2D9404}"/>
+                <a16:creationId xmlns:a16="http://schemas.microsoft.com/office/drawing/2014/main" id="{F983CA3E-FC48-23FD-9D7E-49FEA525E9A9}"/>
               </a:ext>
             </a:extLst>
           </p:cNvPr>
@@ -957,7 +957,7 @@
           <a:bodyPr/>
           <a:lstStyle/>
           <a:p>
-            <a:fld id="{4FC949B2-5982-463B-940B-304794D3D9C4}" type="datetimeFigureOut">
+            <a:fld id="{1708F33B-46DE-4359-9CC4-E2923593AE9C}" type="datetimeFigureOut">
               <a:rPr kumimoji="1" lang="ja-JP" altLang="en-US" smtClean="0"/>
               <a:t>2026/7/30</a:t>
             </a:fld>
@@ -970,7 +970,7 @@
           <p:cNvPr id="5" name="フッター プレースホルダー 4">
             <a:extLst>
               <a:ext uri="{FF2B5EF4-FFF2-40B4-BE49-F238E27FC236}">
-                <a16:creationId xmlns:a16="http://schemas.microsoft.com/office/drawing/2014/main" id="{9C3C5F2F-2E89-A28A-75C0-D5D339B77FED}"/>
+                <a16:creationId xmlns:a16="http://schemas.microsoft.com/office/drawing/2014/main" id="{B5C2D798-3B1B-3A6F-848F-3183666A22D6}"/>
               </a:ext>
             </a:extLst>
           </p:cNvPr>
@@ -995,7 +995,7 @@
           <p:cNvPr id="6" name="スライド番号プレースホルダー 5">
             <a:extLst>
               <a:ext uri="{FF2B5EF4-FFF2-40B4-BE49-F238E27FC236}">
-                <a16:creationId xmlns:a16="http://schemas.microsoft.com/office/drawing/2014/main" id="{9D7B1C24-4B2F-7465-AEFE-D9CB05D2507B}"/>
+                <a16:creationId xmlns:a16="http://schemas.microsoft.com/office/drawing/2014/main" id="{4AAAEB1D-8B4F-A310-3231-E3BD4B1664CB}"/>
               </a:ext>
             </a:extLst>
           </p:cNvPr>
@@ -1011,7 +1011,7 @@
           <a:bodyPr/>
           <a:lstStyle/>
           <a:p>
-            <a:fld id="{3DA16184-EAAA-43A8-BE9C-AFF73D622F91}" type="slidenum">
+            <a:fld id="{BD425EC5-D5F1-46D1-A997-BE69968BA014}" type="slidenum">
               <a:rPr kumimoji="1" lang="ja-JP" altLang="en-US" smtClean="0"/>
               <a:t>‹#›</a:t>
             </a:fld>
@@ -1022,7 +1022,7 @@
     </p:spTree>
     <p:extLst>
       <p:ext uri="{BB962C8B-B14F-4D97-AF65-F5344CB8AC3E}">
-        <p14:creationId xmlns:p14="http://schemas.microsoft.com/office/powerpoint/2010/main" val="1529734240"/>
+        <p14:creationId xmlns:p14="http://schemas.microsoft.com/office/powerpoint/2010/main" val="3858386717"/>
       </p:ext>
     </p:extLst>
   </p:cSld>
@@ -1054,7 +1054,7 @@
           <p:cNvPr id="2" name="タイトル 1">
             <a:extLst>
               <a:ext uri="{FF2B5EF4-FFF2-40B4-BE49-F238E27FC236}">
-                <a16:creationId xmlns:a16="http://schemas.microsoft.com/office/drawing/2014/main" id="{60EBB3B2-3365-9C97-937E-81C802EF0D67}"/>
+                <a16:creationId xmlns:a16="http://schemas.microsoft.com/office/drawing/2014/main" id="{61F5DB97-C259-B7B3-71C1-DE80AB2028A3}"/>
               </a:ext>
             </a:extLst>
           </p:cNvPr>
@@ -1091,7 +1091,7 @@
           <p:cNvPr id="3" name="テキスト プレースホルダー 2">
             <a:extLst>
               <a:ext uri="{FF2B5EF4-FFF2-40B4-BE49-F238E27FC236}">
-                <a16:creationId xmlns:a16="http://schemas.microsoft.com/office/drawing/2014/main" id="{2E6B7A32-9CBE-9E23-0580-7AF0CAFFDC0A}"/>
+                <a16:creationId xmlns:a16="http://schemas.microsoft.com/office/drawing/2014/main" id="{05CDFC51-31B1-DDFF-5E9B-69AD7944453C}"/>
               </a:ext>
             </a:extLst>
           </p:cNvPr>
@@ -1216,7 +1216,7 @@
           <p:cNvPr id="4" name="日付プレースホルダー 3">
             <a:extLst>
               <a:ext uri="{FF2B5EF4-FFF2-40B4-BE49-F238E27FC236}">
-                <a16:creationId xmlns:a16="http://schemas.microsoft.com/office/drawing/2014/main" id="{886A5729-4270-F657-9133-69EE9EC2C574}"/>
+                <a16:creationId xmlns:a16="http://schemas.microsoft.com/office/drawing/2014/main" id="{3293B3A7-F8EB-8011-FFFC-56BBAAB2494D}"/>
               </a:ext>
             </a:extLst>
           </p:cNvPr>
@@ -1232,7 +1232,7 @@
           <a:bodyPr/>
           <a:lstStyle/>
           <a:p>
-            <a:fld id="{4FC949B2-5982-463B-940B-304794D3D9C4}" type="datetimeFigureOut">
+            <a:fld id="{1708F33B-46DE-4359-9CC4-E2923593AE9C}" type="datetimeFigureOut">
               <a:rPr kumimoji="1" lang="ja-JP" altLang="en-US" smtClean="0"/>
               <a:t>2026/7/30</a:t>
             </a:fld>
@@ -1245,7 +1245,7 @@
           <p:cNvPr id="5" name="フッター プレースホルダー 4">
             <a:extLst>
               <a:ext uri="{FF2B5EF4-FFF2-40B4-BE49-F238E27FC236}">
-                <a16:creationId xmlns:a16="http://schemas.microsoft.com/office/drawing/2014/main" id="{38762989-8C07-3F95-3369-442564414362}"/>
+                <a16:creationId xmlns:a16="http://schemas.microsoft.com/office/drawing/2014/main" id="{71274509-BE52-4A90-2914-BA1826208DC9}"/>
               </a:ext>
             </a:extLst>
           </p:cNvPr>
@@ -1270,7 +1270,7 @@
           <p:cNvPr id="6" name="スライド番号プレースホルダー 5">
             <a:extLst>
               <a:ext uri="{FF2B5EF4-FFF2-40B4-BE49-F238E27FC236}">
-                <a16:creationId xmlns:a16="http://schemas.microsoft.com/office/drawing/2014/main" id="{0A87943E-F705-2BF3-1BDD-609F66516624}"/>
+                <a16:creationId xmlns:a16="http://schemas.microsoft.com/office/drawing/2014/main" id="{3A3DAF2F-1198-3B16-D0A4-223238A83B90}"/>
               </a:ext>
             </a:extLst>
           </p:cNvPr>
@@ -1286,7 +1286,7 @@
           <a:bodyPr/>
           <a:lstStyle/>
           <a:p>
-            <a:fld id="{3DA16184-EAAA-43A8-BE9C-AFF73D622F91}" type="slidenum">
+            <a:fld id="{BD425EC5-D5F1-46D1-A997-BE69968BA014}" type="slidenum">
               <a:rPr kumimoji="1" lang="ja-JP" altLang="en-US" smtClean="0"/>
               <a:t>‹#›</a:t>
             </a:fld>
@@ -1297,7 +1297,7 @@
     </p:spTree>
     <p:extLst>
       <p:ext uri="{BB962C8B-B14F-4D97-AF65-F5344CB8AC3E}">
-        <p14:creationId xmlns:p14="http://schemas.microsoft.com/office/powerpoint/2010/main" val="2755304477"/>
+        <p14:creationId xmlns:p14="http://schemas.microsoft.com/office/powerpoint/2010/main" val="3008105641"/>
       </p:ext>
     </p:extLst>
   </p:cSld>
@@ -1329,7 +1329,7 @@
           <p:cNvPr id="2" name="タイトル 1">
             <a:extLst>
               <a:ext uri="{FF2B5EF4-FFF2-40B4-BE49-F238E27FC236}">
-                <a16:creationId xmlns:a16="http://schemas.microsoft.com/office/drawing/2014/main" id="{631D00EC-CAA9-0E21-871D-05CDE29C7D49}"/>
+                <a16:creationId xmlns:a16="http://schemas.microsoft.com/office/drawing/2014/main" id="{8627F8ED-A3DB-555F-EECE-F70CB96AE398}"/>
               </a:ext>
             </a:extLst>
           </p:cNvPr>
@@ -1357,7 +1357,7 @@
           <p:cNvPr id="3" name="コンテンツ プレースホルダー 2">
             <a:extLst>
               <a:ext uri="{FF2B5EF4-FFF2-40B4-BE49-F238E27FC236}">
-                <a16:creationId xmlns:a16="http://schemas.microsoft.com/office/drawing/2014/main" id="{AAE8B7ED-0039-C0B6-4C2A-34C2785DFF08}"/>
+                <a16:creationId xmlns:a16="http://schemas.microsoft.com/office/drawing/2014/main" id="{D555C69F-CF86-4ACE-83C2-B3B10B957EF5}"/>
               </a:ext>
             </a:extLst>
           </p:cNvPr>
@@ -1451,7 +1451,7 @@
           <p:cNvPr id="4" name="コンテンツ プレースホルダー 3">
             <a:extLst>
               <a:ext uri="{FF2B5EF4-FFF2-40B4-BE49-F238E27FC236}">
-                <a16:creationId xmlns:a16="http://schemas.microsoft.com/office/drawing/2014/main" id="{80567F96-2A60-695B-D1C1-195B1D9B309E}"/>
+                <a16:creationId xmlns:a16="http://schemas.microsoft.com/office/drawing/2014/main" id="{02C43840-A54B-1BCB-EF11-82A9A090DF90}"/>
               </a:ext>
             </a:extLst>
           </p:cNvPr>
@@ -1545,7 +1545,7 @@
           <p:cNvPr id="5" name="日付プレースホルダー 4">
             <a:extLst>
               <a:ext uri="{FF2B5EF4-FFF2-40B4-BE49-F238E27FC236}">
-                <a16:creationId xmlns:a16="http://schemas.microsoft.com/office/drawing/2014/main" id="{9F11FD13-0AE1-744E-D291-8B2ABE999BDC}"/>
+                <a16:creationId xmlns:a16="http://schemas.microsoft.com/office/drawing/2014/main" id="{FBF30AE7-3C80-5913-2F49-40B4B0E72849}"/>
               </a:ext>
             </a:extLst>
           </p:cNvPr>
@@ -1561,7 +1561,7 @@
           <a:bodyPr/>
           <a:lstStyle/>
           <a:p>
-            <a:fld id="{4FC949B2-5982-463B-940B-304794D3D9C4}" type="datetimeFigureOut">
+            <a:fld id="{1708F33B-46DE-4359-9CC4-E2923593AE9C}" type="datetimeFigureOut">
               <a:rPr kumimoji="1" lang="ja-JP" altLang="en-US" smtClean="0"/>
               <a:t>2026/7/30</a:t>
             </a:fld>
@@ -1574,7 +1574,7 @@
           <p:cNvPr id="6" name="フッター プレースホルダー 5">
             <a:extLst>
               <a:ext uri="{FF2B5EF4-FFF2-40B4-BE49-F238E27FC236}">
-                <a16:creationId xmlns:a16="http://schemas.microsoft.com/office/drawing/2014/main" id="{E0E946F1-48B9-3467-3238-B3E2373EA754}"/>
+                <a16:creationId xmlns:a16="http://schemas.microsoft.com/office/drawing/2014/main" id="{09B4212A-E681-0D79-70A3-AF3DCB94F143}"/>
               </a:ext>
             </a:extLst>
           </p:cNvPr>
@@ -1599,7 +1599,7 @@
           <p:cNvPr id="7" name="スライド番号プレースホルダー 6">
             <a:extLst>
               <a:ext uri="{FF2B5EF4-FFF2-40B4-BE49-F238E27FC236}">
-                <a16:creationId xmlns:a16="http://schemas.microsoft.com/office/drawing/2014/main" id="{26B739CF-12CC-64D6-14D9-87686E67626B}"/>
+                <a16:creationId xmlns:a16="http://schemas.microsoft.com/office/drawing/2014/main" id="{ACD25BFA-F59F-CB67-1794-FB48C87212F4}"/>
               </a:ext>
             </a:extLst>
           </p:cNvPr>
@@ -1615,7 +1615,7 @@
           <a:bodyPr/>
           <a:lstStyle/>
           <a:p>
-            <a:fld id="{3DA16184-EAAA-43A8-BE9C-AFF73D622F91}" type="slidenum">
+            <a:fld id="{BD425EC5-D5F1-46D1-A997-BE69968BA014}" type="slidenum">
               <a:rPr kumimoji="1" lang="ja-JP" altLang="en-US" smtClean="0"/>
               <a:t>‹#›</a:t>
             </a:fld>
@@ -1626,7 +1626,7 @@
     </p:spTree>
     <p:extLst>
       <p:ext uri="{BB962C8B-B14F-4D97-AF65-F5344CB8AC3E}">
-        <p14:creationId xmlns:p14="http://schemas.microsoft.com/office/powerpoint/2010/main" val="1639019553"/>
+        <p14:creationId xmlns:p14="http://schemas.microsoft.com/office/powerpoint/2010/main" val="1087075380"/>
       </p:ext>
     </p:extLst>
   </p:cSld>
@@ -1658,7 +1658,7 @@
           <p:cNvPr id="2" name="タイトル 1">
             <a:extLst>
               <a:ext uri="{FF2B5EF4-FFF2-40B4-BE49-F238E27FC236}">
-                <a16:creationId xmlns:a16="http://schemas.microsoft.com/office/drawing/2014/main" id="{6AD4857F-455E-4CF3-9A01-ECB5C43E57C7}"/>
+                <a16:creationId xmlns:a16="http://schemas.microsoft.com/office/drawing/2014/main" id="{5EAA8715-B619-7E75-120B-092D5B4CB1B0}"/>
               </a:ext>
             </a:extLst>
           </p:cNvPr>
@@ -1691,7 +1691,7 @@
           <p:cNvPr id="3" name="テキスト プレースホルダー 2">
             <a:extLst>
               <a:ext uri="{FF2B5EF4-FFF2-40B4-BE49-F238E27FC236}">
-                <a16:creationId xmlns:a16="http://schemas.microsoft.com/office/drawing/2014/main" id="{A5E7D6C5-85F9-354F-5963-0EB68AEC950E}"/>
+                <a16:creationId xmlns:a16="http://schemas.microsoft.com/office/drawing/2014/main" id="{28B63967-CE1C-CDFB-46C4-51A24EB2D135}"/>
               </a:ext>
             </a:extLst>
           </p:cNvPr>
@@ -1762,7 +1762,7 @@
           <p:cNvPr id="4" name="コンテンツ プレースホルダー 3">
             <a:extLst>
               <a:ext uri="{FF2B5EF4-FFF2-40B4-BE49-F238E27FC236}">
-                <a16:creationId xmlns:a16="http://schemas.microsoft.com/office/drawing/2014/main" id="{5136ACD9-27F6-AADE-21AE-ECA5B5D148E8}"/>
+                <a16:creationId xmlns:a16="http://schemas.microsoft.com/office/drawing/2014/main" id="{AEB0C79E-C8D8-7932-F1EF-8F355AE257E1}"/>
               </a:ext>
             </a:extLst>
           </p:cNvPr>
@@ -1856,7 +1856,7 @@
           <p:cNvPr id="5" name="テキスト プレースホルダー 4">
             <a:extLst>
               <a:ext uri="{FF2B5EF4-FFF2-40B4-BE49-F238E27FC236}">
-                <a16:creationId xmlns:a16="http://schemas.microsoft.com/office/drawing/2014/main" id="{BCA87601-AFA2-3CF3-91D7-0CF7C36D1B09}"/>
+                <a16:creationId xmlns:a16="http://schemas.microsoft.com/office/drawing/2014/main" id="{F7313D3A-E71D-6613-6383-1D92B18415A5}"/>
               </a:ext>
             </a:extLst>
           </p:cNvPr>
@@ -1927,7 +1927,7 @@
           <p:cNvPr id="6" name="コンテンツ プレースホルダー 5">
             <a:extLst>
               <a:ext uri="{FF2B5EF4-FFF2-40B4-BE49-F238E27FC236}">
-                <a16:creationId xmlns:a16="http://schemas.microsoft.com/office/drawing/2014/main" id="{1B10442C-5A11-7C51-4ABE-71DCEDC828AA}"/>
+                <a16:creationId xmlns:a16="http://schemas.microsoft.com/office/drawing/2014/main" id="{7FC3A66B-EEDB-44C2-2603-4628C844653C}"/>
               </a:ext>
             </a:extLst>
           </p:cNvPr>
@@ -2021,7 +2021,7 @@
           <p:cNvPr id="7" name="日付プレースホルダー 6">
             <a:extLst>
               <a:ext uri="{FF2B5EF4-FFF2-40B4-BE49-F238E27FC236}">
-                <a16:creationId xmlns:a16="http://schemas.microsoft.com/office/drawing/2014/main" id="{3D7BA354-C891-858F-72EA-CDEEBCB80DC1}"/>
+                <a16:creationId xmlns:a16="http://schemas.microsoft.com/office/drawing/2014/main" id="{553838E3-7436-4A09-BB3A-8EB516CECBB3}"/>
               </a:ext>
             </a:extLst>
           </p:cNvPr>
@@ -2037,7 +2037,7 @@
           <a:bodyPr/>
           <a:lstStyle/>
           <a:p>
-            <a:fld id="{4FC949B2-5982-463B-940B-304794D3D9C4}" type="datetimeFigureOut">
+            <a:fld id="{1708F33B-46DE-4359-9CC4-E2923593AE9C}" type="datetimeFigureOut">
               <a:rPr kumimoji="1" lang="ja-JP" altLang="en-US" smtClean="0"/>
               <a:t>2026/7/30</a:t>
             </a:fld>
@@ -2050,7 +2050,7 @@
           <p:cNvPr id="8" name="フッター プレースホルダー 7">
             <a:extLst>
               <a:ext uri="{FF2B5EF4-FFF2-40B4-BE49-F238E27FC236}">
-                <a16:creationId xmlns:a16="http://schemas.microsoft.com/office/drawing/2014/main" id="{B163586A-1E75-C1B5-D397-F77915568607}"/>
+                <a16:creationId xmlns:a16="http://schemas.microsoft.com/office/drawing/2014/main" id="{408FEC6B-CC7C-93F1-A878-01DBF8391ED2}"/>
               </a:ext>
             </a:extLst>
           </p:cNvPr>
@@ -2075,7 +2075,7 @@
           <p:cNvPr id="9" name="スライド番号プレースホルダー 8">
             <a:extLst>
               <a:ext uri="{FF2B5EF4-FFF2-40B4-BE49-F238E27FC236}">
-                <a16:creationId xmlns:a16="http://schemas.microsoft.com/office/drawing/2014/main" id="{77048F3E-56B0-3C99-CF6C-BDE3D661F43E}"/>
+                <a16:creationId xmlns:a16="http://schemas.microsoft.com/office/drawing/2014/main" id="{ADA831E6-1FA7-B0CA-DFF6-6A063EB2E319}"/>
               </a:ext>
             </a:extLst>
           </p:cNvPr>
@@ -2091,7 +2091,7 @@
           <a:bodyPr/>
           <a:lstStyle/>
           <a:p>
-            <a:fld id="{3DA16184-EAAA-43A8-BE9C-AFF73D622F91}" type="slidenum">
+            <a:fld id="{BD425EC5-D5F1-46D1-A997-BE69968BA014}" type="slidenum">
               <a:rPr kumimoji="1" lang="ja-JP" altLang="en-US" smtClean="0"/>
               <a:t>‹#›</a:t>
             </a:fld>
@@ -2102,7 +2102,7 @@
     </p:spTree>
     <p:extLst>
       <p:ext uri="{BB962C8B-B14F-4D97-AF65-F5344CB8AC3E}">
-        <p14:creationId xmlns:p14="http://schemas.microsoft.com/office/powerpoint/2010/main" val="1004991733"/>
+        <p14:creationId xmlns:p14="http://schemas.microsoft.com/office/powerpoint/2010/main" val="3257925814"/>
       </p:ext>
     </p:extLst>
   </p:cSld>
@@ -2134,7 +2134,7 @@
           <p:cNvPr id="2" name="タイトル 1">
             <a:extLst>
               <a:ext uri="{FF2B5EF4-FFF2-40B4-BE49-F238E27FC236}">
-                <a16:creationId xmlns:a16="http://schemas.microsoft.com/office/drawing/2014/main" id="{1F85D301-2289-EC95-FECA-8FFF2758FFA4}"/>
+                <a16:creationId xmlns:a16="http://schemas.microsoft.com/office/drawing/2014/main" id="{A0688B18-3ACA-18E3-A792-E88A2C262768}"/>
               </a:ext>
             </a:extLst>
           </p:cNvPr>
@@ -2162,7 +2162,7 @@
           <p:cNvPr id="3" name="日付プレースホルダー 2">
             <a:extLst>
               <a:ext uri="{FF2B5EF4-FFF2-40B4-BE49-F238E27FC236}">
-                <a16:creationId xmlns:a16="http://schemas.microsoft.com/office/drawing/2014/main" id="{DB04A5BA-3834-9378-4A57-99C36F4937FD}"/>
+                <a16:creationId xmlns:a16="http://schemas.microsoft.com/office/drawing/2014/main" id="{F0B28865-E76A-9271-941B-28B6391CB8C5}"/>
               </a:ext>
             </a:extLst>
           </p:cNvPr>
@@ -2178,7 +2178,7 @@
           <a:bodyPr/>
           <a:lstStyle/>
           <a:p>
-            <a:fld id="{4FC949B2-5982-463B-940B-304794D3D9C4}" type="datetimeFigureOut">
+            <a:fld id="{1708F33B-46DE-4359-9CC4-E2923593AE9C}" type="datetimeFigureOut">
               <a:rPr kumimoji="1" lang="ja-JP" altLang="en-US" smtClean="0"/>
               <a:t>2026/7/30</a:t>
             </a:fld>
@@ -2191,7 +2191,7 @@
           <p:cNvPr id="4" name="フッター プレースホルダー 3">
             <a:extLst>
               <a:ext uri="{FF2B5EF4-FFF2-40B4-BE49-F238E27FC236}">
-                <a16:creationId xmlns:a16="http://schemas.microsoft.com/office/drawing/2014/main" id="{7AD7692A-B9E2-C5C5-970C-627C38D6E071}"/>
+                <a16:creationId xmlns:a16="http://schemas.microsoft.com/office/drawing/2014/main" id="{4C6FA108-41D9-6A0D-BFB6-DC734A2D0F47}"/>
               </a:ext>
             </a:extLst>
           </p:cNvPr>
@@ -2216,7 +2216,7 @@
           <p:cNvPr id="5" name="スライド番号プレースホルダー 4">
             <a:extLst>
               <a:ext uri="{FF2B5EF4-FFF2-40B4-BE49-F238E27FC236}">
-                <a16:creationId xmlns:a16="http://schemas.microsoft.com/office/drawing/2014/main" id="{DFAAE0BA-FC94-0BAD-7E61-7AA174BA77E2}"/>
+                <a16:creationId xmlns:a16="http://schemas.microsoft.com/office/drawing/2014/main" id="{70B427B1-BA81-3D46-9543-9100CFB510D2}"/>
               </a:ext>
             </a:extLst>
           </p:cNvPr>
@@ -2232,7 +2232,7 @@
           <a:bodyPr/>
           <a:lstStyle/>
           <a:p>
-            <a:fld id="{3DA16184-EAAA-43A8-BE9C-AFF73D622F91}" type="slidenum">
+            <a:fld id="{BD425EC5-D5F1-46D1-A997-BE69968BA014}" type="slidenum">
               <a:rPr kumimoji="1" lang="ja-JP" altLang="en-US" smtClean="0"/>
               <a:t>‹#›</a:t>
             </a:fld>
@@ -2243,7 +2243,7 @@
     </p:spTree>
     <p:extLst>
       <p:ext uri="{BB962C8B-B14F-4D97-AF65-F5344CB8AC3E}">
-        <p14:creationId xmlns:p14="http://schemas.microsoft.com/office/powerpoint/2010/main" val="2795502301"/>
+        <p14:creationId xmlns:p14="http://schemas.microsoft.com/office/powerpoint/2010/main" val="3074537075"/>
       </p:ext>
     </p:extLst>
   </p:cSld>
@@ -2275,7 +2275,7 @@
           <p:cNvPr id="2" name="日付プレースホルダー 1">
             <a:extLst>
               <a:ext uri="{FF2B5EF4-FFF2-40B4-BE49-F238E27FC236}">
-                <a16:creationId xmlns:a16="http://schemas.microsoft.com/office/drawing/2014/main" id="{11503322-CF59-A3D8-4DBE-995BED7B6543}"/>
+                <a16:creationId xmlns:a16="http://schemas.microsoft.com/office/drawing/2014/main" id="{2D0A3C08-DCBB-3C38-FBD0-12E5D89CB0D3}"/>
               </a:ext>
             </a:extLst>
           </p:cNvPr>
@@ -2291,7 +2291,7 @@
           <a:bodyPr/>
           <a:lstStyle/>
           <a:p>
-            <a:fld id="{4FC949B2-5982-463B-940B-304794D3D9C4}" type="datetimeFigureOut">
+            <a:fld id="{1708F33B-46DE-4359-9CC4-E2923593AE9C}" type="datetimeFigureOut">
               <a:rPr kumimoji="1" lang="ja-JP" altLang="en-US" smtClean="0"/>
               <a:t>2026/7/30</a:t>
             </a:fld>
@@ -2304,7 +2304,7 @@
           <p:cNvPr id="3" name="フッター プレースホルダー 2">
             <a:extLst>
               <a:ext uri="{FF2B5EF4-FFF2-40B4-BE49-F238E27FC236}">
-                <a16:creationId xmlns:a16="http://schemas.microsoft.com/office/drawing/2014/main" id="{46D1AAFA-557B-5E86-420F-F1DEC0EEEA81}"/>
+                <a16:creationId xmlns:a16="http://schemas.microsoft.com/office/drawing/2014/main" id="{CE06A9A6-AC97-6EB0-1D09-18C5F60874F6}"/>
               </a:ext>
             </a:extLst>
           </p:cNvPr>
@@ -2329,7 +2329,7 @@
           <p:cNvPr id="4" name="スライド番号プレースホルダー 3">
             <a:extLst>
               <a:ext uri="{FF2B5EF4-FFF2-40B4-BE49-F238E27FC236}">
-                <a16:creationId xmlns:a16="http://schemas.microsoft.com/office/drawing/2014/main" id="{E6CD149F-D57B-9C5F-1FC4-4ED83FA2676C}"/>
+                <a16:creationId xmlns:a16="http://schemas.microsoft.com/office/drawing/2014/main" id="{7A9ED131-A2C6-0614-4D48-29F58C038B4F}"/>
               </a:ext>
             </a:extLst>
           </p:cNvPr>
@@ -2345,7 +2345,7 @@
           <a:bodyPr/>
           <a:lstStyle/>
           <a:p>
-            <a:fld id="{3DA16184-EAAA-43A8-BE9C-AFF73D622F91}" type="slidenum">
+            <a:fld id="{BD425EC5-D5F1-46D1-A997-BE69968BA014}" type="slidenum">
               <a:rPr kumimoji="1" lang="ja-JP" altLang="en-US" smtClean="0"/>
               <a:t>‹#›</a:t>
             </a:fld>
@@ -2356,7 +2356,7 @@
     </p:spTree>
     <p:extLst>
       <p:ext uri="{BB962C8B-B14F-4D97-AF65-F5344CB8AC3E}">
-        <p14:creationId xmlns:p14="http://schemas.microsoft.com/office/powerpoint/2010/main" val="3467083396"/>
+        <p14:creationId xmlns:p14="http://schemas.microsoft.com/office/powerpoint/2010/main" val="3122215569"/>
       </p:ext>
     </p:extLst>
   </p:cSld>
@@ -2388,7 +2388,7 @@
           <p:cNvPr id="2" name="タイトル 1">
             <a:extLst>
               <a:ext uri="{FF2B5EF4-FFF2-40B4-BE49-F238E27FC236}">
-                <a16:creationId xmlns:a16="http://schemas.microsoft.com/office/drawing/2014/main" id="{61D59375-D98B-05C4-8013-EED6FE9D4ADF}"/>
+                <a16:creationId xmlns:a16="http://schemas.microsoft.com/office/drawing/2014/main" id="{FB80D51A-536F-6C46-A844-CF0CF8BE2E13}"/>
               </a:ext>
             </a:extLst>
           </p:cNvPr>
@@ -2425,7 +2425,7 @@
           <p:cNvPr id="3" name="コンテンツ プレースホルダー 2">
             <a:extLst>
               <a:ext uri="{FF2B5EF4-FFF2-40B4-BE49-F238E27FC236}">
-                <a16:creationId xmlns:a16="http://schemas.microsoft.com/office/drawing/2014/main" id="{342247D6-62C7-5A19-C770-672C59EF36BD}"/>
+                <a16:creationId xmlns:a16="http://schemas.microsoft.com/office/drawing/2014/main" id="{8F6AB716-35AE-5A95-554F-9A4804ECC3CC}"/>
               </a:ext>
             </a:extLst>
           </p:cNvPr>
@@ -2547,7 +2547,7 @@
           <p:cNvPr id="4" name="テキスト プレースホルダー 3">
             <a:extLst>
               <a:ext uri="{FF2B5EF4-FFF2-40B4-BE49-F238E27FC236}">
-                <a16:creationId xmlns:a16="http://schemas.microsoft.com/office/drawing/2014/main" id="{8B7D6A87-77C4-1C12-9625-D414F1F30819}"/>
+                <a16:creationId xmlns:a16="http://schemas.microsoft.com/office/drawing/2014/main" id="{37188173-A61A-D9F9-835A-AD63C4FFFC04}"/>
               </a:ext>
             </a:extLst>
           </p:cNvPr>
@@ -2618,7 +2618,7 @@
           <p:cNvPr id="5" name="日付プレースホルダー 4">
             <a:extLst>
               <a:ext uri="{FF2B5EF4-FFF2-40B4-BE49-F238E27FC236}">
-                <a16:creationId xmlns:a16="http://schemas.microsoft.com/office/drawing/2014/main" id="{671B48BF-1D53-F38F-BB98-9CBB16B454AB}"/>
+                <a16:creationId xmlns:a16="http://schemas.microsoft.com/office/drawing/2014/main" id="{7CCDEC2A-B109-0075-0C1F-0BE9E93D8567}"/>
               </a:ext>
             </a:extLst>
           </p:cNvPr>
@@ -2634,7 +2634,7 @@
           <a:bodyPr/>
           <a:lstStyle/>
           <a:p>
-            <a:fld id="{4FC949B2-5982-463B-940B-304794D3D9C4}" type="datetimeFigureOut">
+            <a:fld id="{1708F33B-46DE-4359-9CC4-E2923593AE9C}" type="datetimeFigureOut">
               <a:rPr kumimoji="1" lang="ja-JP" altLang="en-US" smtClean="0"/>
               <a:t>2026/7/30</a:t>
             </a:fld>
@@ -2647,7 +2647,7 @@
           <p:cNvPr id="6" name="フッター プレースホルダー 5">
             <a:extLst>
               <a:ext uri="{FF2B5EF4-FFF2-40B4-BE49-F238E27FC236}">
-                <a16:creationId xmlns:a16="http://schemas.microsoft.com/office/drawing/2014/main" id="{8060415B-59F8-B0E6-991E-4AAB6E025505}"/>
+                <a16:creationId xmlns:a16="http://schemas.microsoft.com/office/drawing/2014/main" id="{43996615-7268-2C0D-C918-CB6F47A11435}"/>
               </a:ext>
             </a:extLst>
           </p:cNvPr>
@@ -2672,7 +2672,7 @@
           <p:cNvPr id="7" name="スライド番号プレースホルダー 6">
             <a:extLst>
               <a:ext uri="{FF2B5EF4-FFF2-40B4-BE49-F238E27FC236}">
-                <a16:creationId xmlns:a16="http://schemas.microsoft.com/office/drawing/2014/main" id="{BD235BB4-776A-8779-C869-0A1FBB236D00}"/>
+                <a16:creationId xmlns:a16="http://schemas.microsoft.com/office/drawing/2014/main" id="{61130B57-6693-2B71-3586-33242884A236}"/>
               </a:ext>
             </a:extLst>
           </p:cNvPr>
@@ -2688,7 +2688,7 @@
           <a:bodyPr/>
           <a:lstStyle/>
           <a:p>
-            <a:fld id="{3DA16184-EAAA-43A8-BE9C-AFF73D622F91}" type="slidenum">
+            <a:fld id="{BD425EC5-D5F1-46D1-A997-BE69968BA014}" type="slidenum">
               <a:rPr kumimoji="1" lang="ja-JP" altLang="en-US" smtClean="0"/>
               <a:t>‹#›</a:t>
             </a:fld>
@@ -2699,7 +2699,7 @@
     </p:spTree>
     <p:extLst>
       <p:ext uri="{BB962C8B-B14F-4D97-AF65-F5344CB8AC3E}">
-        <p14:creationId xmlns:p14="http://schemas.microsoft.com/office/powerpoint/2010/main" val="3071502781"/>
+        <p14:creationId xmlns:p14="http://schemas.microsoft.com/office/powerpoint/2010/main" val="167747926"/>
       </p:ext>
     </p:extLst>
   </p:cSld>
@@ -2731,7 +2731,7 @@
           <p:cNvPr id="2" name="タイトル 1">
             <a:extLst>
               <a:ext uri="{FF2B5EF4-FFF2-40B4-BE49-F238E27FC236}">
-                <a16:creationId xmlns:a16="http://schemas.microsoft.com/office/drawing/2014/main" id="{0FC7AC81-80DE-62F3-1439-B3B3E4EA2B4D}"/>
+                <a16:creationId xmlns:a16="http://schemas.microsoft.com/office/drawing/2014/main" id="{12FC34DA-B34F-3273-662C-864C3722A37C}"/>
               </a:ext>
             </a:extLst>
           </p:cNvPr>
@@ -2768,7 +2768,7 @@
           <p:cNvPr id="3" name="図プレースホルダー 2">
             <a:extLst>
               <a:ext uri="{FF2B5EF4-FFF2-40B4-BE49-F238E27FC236}">
-                <a16:creationId xmlns:a16="http://schemas.microsoft.com/office/drawing/2014/main" id="{AD48DD68-9E43-B452-52CA-B58FF238526A}"/>
+                <a16:creationId xmlns:a16="http://schemas.microsoft.com/office/drawing/2014/main" id="{27327D15-BBE7-B08E-A1E2-1FF0D2440FB3}"/>
               </a:ext>
             </a:extLst>
           </p:cNvPr>
@@ -2835,7 +2835,7 @@
           <p:cNvPr id="4" name="テキスト プレースホルダー 3">
             <a:extLst>
               <a:ext uri="{FF2B5EF4-FFF2-40B4-BE49-F238E27FC236}">
-                <a16:creationId xmlns:a16="http://schemas.microsoft.com/office/drawing/2014/main" id="{5435B562-5F2A-525A-AF74-371A902DF575}"/>
+                <a16:creationId xmlns:a16="http://schemas.microsoft.com/office/drawing/2014/main" id="{667B3B31-F173-EA72-A612-B1245D505D8A}"/>
               </a:ext>
             </a:extLst>
           </p:cNvPr>
@@ -2906,7 +2906,7 @@
           <p:cNvPr id="5" name="日付プレースホルダー 4">
             <a:extLst>
               <a:ext uri="{FF2B5EF4-FFF2-40B4-BE49-F238E27FC236}">
-                <a16:creationId xmlns:a16="http://schemas.microsoft.com/office/drawing/2014/main" id="{756D9360-99BD-C26F-3808-F64129B593FA}"/>
+                <a16:creationId xmlns:a16="http://schemas.microsoft.com/office/drawing/2014/main" id="{1DCADEDC-DEE6-FA91-B2A0-DFB762FB500B}"/>
               </a:ext>
             </a:extLst>
           </p:cNvPr>
@@ -2922,7 +2922,7 @@
           <a:bodyPr/>
           <a:lstStyle/>
           <a:p>
-            <a:fld id="{4FC949B2-5982-463B-940B-304794D3D9C4}" type="datetimeFigureOut">
+            <a:fld id="{1708F33B-46DE-4359-9CC4-E2923593AE9C}" type="datetimeFigureOut">
               <a:rPr kumimoji="1" lang="ja-JP" altLang="en-US" smtClean="0"/>
               <a:t>2026/7/30</a:t>
             </a:fld>
@@ -2935,7 +2935,7 @@
           <p:cNvPr id="6" name="フッター プレースホルダー 5">
             <a:extLst>
               <a:ext uri="{FF2B5EF4-FFF2-40B4-BE49-F238E27FC236}">
-                <a16:creationId xmlns:a16="http://schemas.microsoft.com/office/drawing/2014/main" id="{BC2093DC-FF7B-8842-0854-737A3995AC68}"/>
+                <a16:creationId xmlns:a16="http://schemas.microsoft.com/office/drawing/2014/main" id="{06C7A29A-5A6A-DF5E-74E1-536672B81ED7}"/>
               </a:ext>
             </a:extLst>
           </p:cNvPr>
@@ -2960,7 +2960,7 @@
           <p:cNvPr id="7" name="スライド番号プレースホルダー 6">
             <a:extLst>
               <a:ext uri="{FF2B5EF4-FFF2-40B4-BE49-F238E27FC236}">
-                <a16:creationId xmlns:a16="http://schemas.microsoft.com/office/drawing/2014/main" id="{9DD1C8E0-7BAC-BB56-EB4E-7E878DB86FB7}"/>
+                <a16:creationId xmlns:a16="http://schemas.microsoft.com/office/drawing/2014/main" id="{5A861178-B26C-1949-E8BE-023535965BD0}"/>
               </a:ext>
             </a:extLst>
           </p:cNvPr>
@@ -2976,7 +2976,7 @@
           <a:bodyPr/>
           <a:lstStyle/>
           <a:p>
-            <a:fld id="{3DA16184-EAAA-43A8-BE9C-AFF73D622F91}" type="slidenum">
+            <a:fld id="{BD425EC5-D5F1-46D1-A997-BE69968BA014}" type="slidenum">
               <a:rPr kumimoji="1" lang="ja-JP" altLang="en-US" smtClean="0"/>
               <a:t>‹#›</a:t>
             </a:fld>
@@ -2987,7 +2987,7 @@
     </p:spTree>
     <p:extLst>
       <p:ext uri="{BB962C8B-B14F-4D97-AF65-F5344CB8AC3E}">
-        <p14:creationId xmlns:p14="http://schemas.microsoft.com/office/powerpoint/2010/main" val="1876861801"/>
+        <p14:creationId xmlns:p14="http://schemas.microsoft.com/office/powerpoint/2010/main" val="3711894433"/>
       </p:ext>
     </p:extLst>
   </p:cSld>
@@ -3024,7 +3024,7 @@
           <p:cNvPr id="2" name="タイトル プレースホルダー 1">
             <a:extLst>
               <a:ext uri="{FF2B5EF4-FFF2-40B4-BE49-F238E27FC236}">
-                <a16:creationId xmlns:a16="http://schemas.microsoft.com/office/drawing/2014/main" id="{28BCA584-A4FE-F504-5F6F-6C95629D0606}"/>
+                <a16:creationId xmlns:a16="http://schemas.microsoft.com/office/drawing/2014/main" id="{94729989-F80E-F9CA-C915-5F65C280CBE6}"/>
               </a:ext>
             </a:extLst>
           </p:cNvPr>
@@ -3062,7 +3062,7 @@
           <p:cNvPr id="3" name="テキスト プレースホルダー 2">
             <a:extLst>
               <a:ext uri="{FF2B5EF4-FFF2-40B4-BE49-F238E27FC236}">
-                <a16:creationId xmlns:a16="http://schemas.microsoft.com/office/drawing/2014/main" id="{A2F99913-E0EE-70EB-4442-125671377F81}"/>
+                <a16:creationId xmlns:a16="http://schemas.microsoft.com/office/drawing/2014/main" id="{85B988A4-F9B5-7330-B77B-990C121A2EED}"/>
               </a:ext>
             </a:extLst>
           </p:cNvPr>
@@ -3161,7 +3161,7 @@
           <p:cNvPr id="4" name="日付プレースホルダー 3">
             <a:extLst>
               <a:ext uri="{FF2B5EF4-FFF2-40B4-BE49-F238E27FC236}">
-                <a16:creationId xmlns:a16="http://schemas.microsoft.com/office/drawing/2014/main" id="{82C7D5DF-4776-1F7A-F03F-7193E74A0FD9}"/>
+                <a16:creationId xmlns:a16="http://schemas.microsoft.com/office/drawing/2014/main" id="{462F3ADF-D500-B0C4-A415-08297784D248}"/>
               </a:ext>
             </a:extLst>
           </p:cNvPr>
@@ -3195,7 +3195,7 @@
             </a:lvl1pPr>
           </a:lstStyle>
           <a:p>
-            <a:fld id="{4FC949B2-5982-463B-940B-304794D3D9C4}" type="datetimeFigureOut">
+            <a:fld id="{1708F33B-46DE-4359-9CC4-E2923593AE9C}" type="datetimeFigureOut">
               <a:rPr kumimoji="1" lang="ja-JP" altLang="en-US" smtClean="0"/>
               <a:t>2026/7/30</a:t>
             </a:fld>
@@ -3208,7 +3208,7 @@
           <p:cNvPr id="5" name="フッター プレースホルダー 4">
             <a:extLst>
               <a:ext uri="{FF2B5EF4-FFF2-40B4-BE49-F238E27FC236}">
-                <a16:creationId xmlns:a16="http://schemas.microsoft.com/office/drawing/2014/main" id="{1B805D33-328E-1F6A-1AEC-795D49091905}"/>
+                <a16:creationId xmlns:a16="http://schemas.microsoft.com/office/drawing/2014/main" id="{A0E62043-67AE-F927-1CDB-A6ED22127880}"/>
               </a:ext>
             </a:extLst>
           </p:cNvPr>
@@ -3251,7 +3251,7 @@
           <p:cNvPr id="6" name="スライド番号プレースホルダー 5">
             <a:extLst>
               <a:ext uri="{FF2B5EF4-FFF2-40B4-BE49-F238E27FC236}">
-                <a16:creationId xmlns:a16="http://schemas.microsoft.com/office/drawing/2014/main" id="{EA1DF512-B3B6-762B-11C9-257B703D55B7}"/>
+                <a16:creationId xmlns:a16="http://schemas.microsoft.com/office/drawing/2014/main" id="{4BEA6415-0459-50F6-C412-9E872B1D08F5}"/>
               </a:ext>
             </a:extLst>
           </p:cNvPr>
@@ -3285,7 +3285,7 @@
             </a:lvl1pPr>
           </a:lstStyle>
           <a:p>
-            <a:fld id="{3DA16184-EAAA-43A8-BE9C-AFF73D622F91}" type="slidenum">
+            <a:fld id="{BD425EC5-D5F1-46D1-A997-BE69968BA014}" type="slidenum">
               <a:rPr kumimoji="1" lang="ja-JP" altLang="en-US" smtClean="0"/>
               <a:t>‹#›</a:t>
             </a:fld>
@@ -3296,7 +3296,7 @@
     </p:spTree>
     <p:extLst>
       <p:ext uri="{BB962C8B-B14F-4D97-AF65-F5344CB8AC3E}">
-        <p14:creationId xmlns:p14="http://schemas.microsoft.com/office/powerpoint/2010/main" val="2465268332"/>
+        <p14:creationId xmlns:p14="http://schemas.microsoft.com/office/powerpoint/2010/main" val="1741676205"/>
       </p:ext>
     </p:extLst>
   </p:cSld>
@@ -3619,7 +3619,7 @@
           <p:cNvPr id="2" name="テキスト ボックス 1">
             <a:extLst>
               <a:ext uri="{FF2B5EF4-FFF2-40B4-BE49-F238E27FC236}">
-                <a16:creationId xmlns:a16="http://schemas.microsoft.com/office/drawing/2014/main" id="{7640F924-1385-151D-3E62-CCEEFCCADD00}"/>
+                <a16:creationId xmlns:a16="http://schemas.microsoft.com/office/drawing/2014/main" id="{A4F2A7E4-1DD0-65EC-65F2-3C70D6BC73E1}"/>
               </a:ext>
             </a:extLst>
           </p:cNvPr>
@@ -3665,7 +3665,7 @@
           <p:cNvPr id="3" name="テキスト ボックス 2">
             <a:extLst>
               <a:ext uri="{FF2B5EF4-FFF2-40B4-BE49-F238E27FC236}">
-                <a16:creationId xmlns:a16="http://schemas.microsoft.com/office/drawing/2014/main" id="{09DB0E97-E3A3-0F16-8962-35F840A3803A}"/>
+                <a16:creationId xmlns:a16="http://schemas.microsoft.com/office/drawing/2014/main" id="{869392BC-2F9A-BA22-B642-39951BE591BE}"/>
               </a:ext>
             </a:extLst>
           </p:cNvPr>
@@ -3714,7 +3714,7 @@
           <p:cNvPr id="4" name="テキスト ボックス 3">
             <a:extLst>
               <a:ext uri="{FF2B5EF4-FFF2-40B4-BE49-F238E27FC236}">
-                <a16:creationId xmlns:a16="http://schemas.microsoft.com/office/drawing/2014/main" id="{2EA270EA-F0B3-B4ED-9A11-F592E16D6D9E}"/>
+                <a16:creationId xmlns:a16="http://schemas.microsoft.com/office/drawing/2014/main" id="{A4058CAF-7CD3-988C-A6C8-8104C49785F4}"/>
               </a:ext>
             </a:extLst>
           </p:cNvPr>
@@ -3754,7 +3754,7 @@
           <p:cNvPr id="5" name="テキスト ボックス 4">
             <a:extLst>
               <a:ext uri="{FF2B5EF4-FFF2-40B4-BE49-F238E27FC236}">
-                <a16:creationId xmlns:a16="http://schemas.microsoft.com/office/drawing/2014/main" id="{0D4A3150-F4FD-678D-73C0-43E52E6AAE0A}"/>
+                <a16:creationId xmlns:a16="http://schemas.microsoft.com/office/drawing/2014/main" id="{DB2B024A-DDC9-3F61-E59E-00C8C6052064}"/>
               </a:ext>
             </a:extLst>
           </p:cNvPr>
@@ -3801,7 +3801,7 @@
             <a:hlinkClick r:id="" action="ppaction://media"/>
             <a:extLst>
               <a:ext uri="{FF2B5EF4-FFF2-40B4-BE49-F238E27FC236}">
-                <a16:creationId xmlns:a16="http://schemas.microsoft.com/office/drawing/2014/main" id="{07B641EB-9197-2A6E-6077-8D7623E17E63}"/>
+                <a16:creationId xmlns:a16="http://schemas.microsoft.com/office/drawing/2014/main" id="{0EBEF1D5-B368-D974-6FD3-F0991DB13E3D}"/>
               </a:ext>
             </a:extLst>
           </p:cNvPr>
@@ -3836,7 +3836,7 @@
     </p:spTree>
     <p:extLst>
       <p:ext uri="{BB962C8B-B14F-4D97-AF65-F5344CB8AC3E}">
-        <p14:creationId xmlns:p14="http://schemas.microsoft.com/office/powerpoint/2010/main" val="1266063389"/>
+        <p14:creationId xmlns:p14="http://schemas.microsoft.com/office/powerpoint/2010/main" val="3987931733"/>
       </p:ext>
     </p:extLst>
   </p:cSld>
@@ -3960,7 +3960,7 @@
           <p:cNvPr id="2" name="テキスト ボックス 1">
             <a:extLst>
               <a:ext uri="{FF2B5EF4-FFF2-40B4-BE49-F238E27FC236}">
-                <a16:creationId xmlns:a16="http://schemas.microsoft.com/office/drawing/2014/main" id="{17C05B3F-0643-A191-F648-A919B3B5396C}"/>
+                <a16:creationId xmlns:a16="http://schemas.microsoft.com/office/drawing/2014/main" id="{7876C574-B228-96B5-BF13-30435F66A754}"/>
               </a:ext>
             </a:extLst>
           </p:cNvPr>
@@ -4006,7 +4006,7 @@
           <p:cNvPr id="3" name="テキスト ボックス 2">
             <a:extLst>
               <a:ext uri="{FF2B5EF4-FFF2-40B4-BE49-F238E27FC236}">
-                <a16:creationId xmlns:a16="http://schemas.microsoft.com/office/drawing/2014/main" id="{92795330-C632-5F93-D964-5B951C49E9D4}"/>
+                <a16:creationId xmlns:a16="http://schemas.microsoft.com/office/drawing/2014/main" id="{B2F781E9-6BED-6688-47DB-230EE483DC14}"/>
               </a:ext>
             </a:extLst>
           </p:cNvPr>
@@ -4046,7 +4046,7 @@
           <p:cNvPr id="4" name="テキスト ボックス 3">
             <a:extLst>
               <a:ext uri="{FF2B5EF4-FFF2-40B4-BE49-F238E27FC236}">
-                <a16:creationId xmlns:a16="http://schemas.microsoft.com/office/drawing/2014/main" id="{650F1E27-EF7D-F699-75BD-F5289B5502DD}"/>
+                <a16:creationId xmlns:a16="http://schemas.microsoft.com/office/drawing/2014/main" id="{2D4D2B95-8CE9-CE01-3C91-88C08C1B9F99}"/>
               </a:ext>
             </a:extLst>
           </p:cNvPr>
@@ -4110,7 +4110,7 @@
           <p:cNvPr id="5" name="テキスト ボックス 4">
             <a:extLst>
               <a:ext uri="{FF2B5EF4-FFF2-40B4-BE49-F238E27FC236}">
-                <a16:creationId xmlns:a16="http://schemas.microsoft.com/office/drawing/2014/main" id="{37AECCEC-AE83-193A-A41B-88894412F566}"/>
+                <a16:creationId xmlns:a16="http://schemas.microsoft.com/office/drawing/2014/main" id="{58639CE2-2BAC-E747-F6A6-450D27A50179}"/>
               </a:ext>
             </a:extLst>
           </p:cNvPr>
@@ -4157,7 +4157,7 @@
             <a:hlinkClick r:id="" action="ppaction://media"/>
             <a:extLst>
               <a:ext uri="{FF2B5EF4-FFF2-40B4-BE49-F238E27FC236}">
-                <a16:creationId xmlns:a16="http://schemas.microsoft.com/office/drawing/2014/main" id="{65BCBA55-50A7-49AD-AF9E-FE4520E5FE0A}"/>
+                <a16:creationId xmlns:a16="http://schemas.microsoft.com/office/drawing/2014/main" id="{66B5E7AE-AAC8-6283-5A70-D352D62DF165}"/>
               </a:ext>
             </a:extLst>
           </p:cNvPr>
@@ -4192,7 +4192,7 @@
     </p:spTree>
     <p:extLst>
       <p:ext uri="{BB962C8B-B14F-4D97-AF65-F5344CB8AC3E}">
-        <p14:creationId xmlns:p14="http://schemas.microsoft.com/office/powerpoint/2010/main" val="641409544"/>
+        <p14:creationId xmlns:p14="http://schemas.microsoft.com/office/powerpoint/2010/main" val="2489188564"/>
       </p:ext>
     </p:extLst>
   </p:cSld>
@@ -4316,7 +4316,7 @@
           <p:cNvPr id="2" name="テキスト ボックス 1">
             <a:extLst>
               <a:ext uri="{FF2B5EF4-FFF2-40B4-BE49-F238E27FC236}">
-                <a16:creationId xmlns:a16="http://schemas.microsoft.com/office/drawing/2014/main" id="{0D733F7F-2294-7F0D-A619-93ADB7759A65}"/>
+                <a16:creationId xmlns:a16="http://schemas.microsoft.com/office/drawing/2014/main" id="{93D5F4F6-3403-2F0E-F705-310258E68CA7}"/>
               </a:ext>
             </a:extLst>
           </p:cNvPr>
@@ -4362,7 +4362,7 @@
           <p:cNvPr id="3" name="テキスト ボックス 2">
             <a:extLst>
               <a:ext uri="{FF2B5EF4-FFF2-40B4-BE49-F238E27FC236}">
-                <a16:creationId xmlns:a16="http://schemas.microsoft.com/office/drawing/2014/main" id="{32836847-8BCE-4EB1-35DD-C3103648D07A}"/>
+                <a16:creationId xmlns:a16="http://schemas.microsoft.com/office/drawing/2014/main" id="{B44C9DDA-D702-D995-103F-B75DE88CE07C}"/>
               </a:ext>
             </a:extLst>
           </p:cNvPr>
@@ -4402,7 +4402,7 @@
           <p:cNvPr id="4" name="テキスト ボックス 3">
             <a:extLst>
               <a:ext uri="{FF2B5EF4-FFF2-40B4-BE49-F238E27FC236}">
-                <a16:creationId xmlns:a16="http://schemas.microsoft.com/office/drawing/2014/main" id="{DC107543-EB97-F7FD-BFA8-EED03F69ECE2}"/>
+                <a16:creationId xmlns:a16="http://schemas.microsoft.com/office/drawing/2014/main" id="{41B24291-FC13-C890-2E25-AD26DD63A987}"/>
               </a:ext>
             </a:extLst>
           </p:cNvPr>
@@ -4497,7 +4497,7 @@
           <p:cNvPr id="5" name="テキスト ボックス 4">
             <a:extLst>
               <a:ext uri="{FF2B5EF4-FFF2-40B4-BE49-F238E27FC236}">
-                <a16:creationId xmlns:a16="http://schemas.microsoft.com/office/drawing/2014/main" id="{A82270E8-8D00-6448-C73A-FF6B62146296}"/>
+                <a16:creationId xmlns:a16="http://schemas.microsoft.com/office/drawing/2014/main" id="{92E571AA-05E2-9233-ED81-1D9A66FB5EC8}"/>
               </a:ext>
             </a:extLst>
           </p:cNvPr>
@@ -4544,7 +4544,7 @@
             <a:hlinkClick r:id="" action="ppaction://media"/>
             <a:extLst>
               <a:ext uri="{FF2B5EF4-FFF2-40B4-BE49-F238E27FC236}">
-                <a16:creationId xmlns:a16="http://schemas.microsoft.com/office/drawing/2014/main" id="{B26B3B4F-837F-0A90-BD00-52C83D2DA60F}"/>
+                <a16:creationId xmlns:a16="http://schemas.microsoft.com/office/drawing/2014/main" id="{AB515DD7-4DB9-ABD1-0C7A-E66EE4191814}"/>
               </a:ext>
             </a:extLst>
           </p:cNvPr>
@@ -4579,7 +4579,7 @@
     </p:spTree>
     <p:extLst>
       <p:ext uri="{BB962C8B-B14F-4D97-AF65-F5344CB8AC3E}">
-        <p14:creationId xmlns:p14="http://schemas.microsoft.com/office/powerpoint/2010/main" val="878746092"/>
+        <p14:creationId xmlns:p14="http://schemas.microsoft.com/office/powerpoint/2010/main" val="2680283493"/>
       </p:ext>
     </p:extLst>
   </p:cSld>
@@ -4703,7 +4703,7 @@
           <p:cNvPr id="2" name="テキスト ボックス 1">
             <a:extLst>
               <a:ext uri="{FF2B5EF4-FFF2-40B4-BE49-F238E27FC236}">
-                <a16:creationId xmlns:a16="http://schemas.microsoft.com/office/drawing/2014/main" id="{2318BA5B-2DA7-6C1A-73F4-10E07ADA4C0E}"/>
+                <a16:creationId xmlns:a16="http://schemas.microsoft.com/office/drawing/2014/main" id="{BA2A9734-AD90-3426-8B84-0025D91FA4AF}"/>
               </a:ext>
             </a:extLst>
           </p:cNvPr>
@@ -4749,7 +4749,7 @@
           <p:cNvPr id="3" name="テキスト ボックス 2">
             <a:extLst>
               <a:ext uri="{FF2B5EF4-FFF2-40B4-BE49-F238E27FC236}">
-                <a16:creationId xmlns:a16="http://schemas.microsoft.com/office/drawing/2014/main" id="{A0CC547D-9818-9B4F-D33A-91BD853966A2}"/>
+                <a16:creationId xmlns:a16="http://schemas.microsoft.com/office/drawing/2014/main" id="{B6024291-AD52-5846-66E9-273F60C1F59C}"/>
               </a:ext>
             </a:extLst>
           </p:cNvPr>
@@ -4789,7 +4789,7 @@
           <p:cNvPr id="4" name="テキスト ボックス 3">
             <a:extLst>
               <a:ext uri="{FF2B5EF4-FFF2-40B4-BE49-F238E27FC236}">
-                <a16:creationId xmlns:a16="http://schemas.microsoft.com/office/drawing/2014/main" id="{958EECDB-100C-6829-49EE-501FA0CE4609}"/>
+                <a16:creationId xmlns:a16="http://schemas.microsoft.com/office/drawing/2014/main" id="{532EF326-3F74-B4E1-B9EC-7EB5D2E4F80D}"/>
               </a:ext>
             </a:extLst>
           </p:cNvPr>
@@ -4899,7 +4899,7 @@
           <p:cNvPr id="5" name="テキスト ボックス 4">
             <a:extLst>
               <a:ext uri="{FF2B5EF4-FFF2-40B4-BE49-F238E27FC236}">
-                <a16:creationId xmlns:a16="http://schemas.microsoft.com/office/drawing/2014/main" id="{4122CC1A-AB15-DE68-D28B-59B9DEE06544}"/>
+                <a16:creationId xmlns:a16="http://schemas.microsoft.com/office/drawing/2014/main" id="{4CCB5DEE-4A12-6406-DD4C-6B67D75E5C61}"/>
               </a:ext>
             </a:extLst>
           </p:cNvPr>
@@ -4946,7 +4946,7 @@
             <a:hlinkClick r:id="" action="ppaction://media"/>
             <a:extLst>
               <a:ext uri="{FF2B5EF4-FFF2-40B4-BE49-F238E27FC236}">
-                <a16:creationId xmlns:a16="http://schemas.microsoft.com/office/drawing/2014/main" id="{50BA1D8B-5579-2EEC-08C2-CE0EF96882DC}"/>
+                <a16:creationId xmlns:a16="http://schemas.microsoft.com/office/drawing/2014/main" id="{A2CF8653-F06F-AB81-90C0-E4AFE8D0D7D2}"/>
               </a:ext>
             </a:extLst>
           </p:cNvPr>
@@ -4981,7 +4981,7 @@
     </p:spTree>
     <p:extLst>
       <p:ext uri="{BB962C8B-B14F-4D97-AF65-F5344CB8AC3E}">
-        <p14:creationId xmlns:p14="http://schemas.microsoft.com/office/powerpoint/2010/main" val="118547287"/>
+        <p14:creationId xmlns:p14="http://schemas.microsoft.com/office/powerpoint/2010/main" val="811716616"/>
       </p:ext>
     </p:extLst>
   </p:cSld>
@@ -5105,7 +5105,7 @@
           <p:cNvPr id="2" name="テキスト ボックス 1">
             <a:extLst>
               <a:ext uri="{FF2B5EF4-FFF2-40B4-BE49-F238E27FC236}">
-                <a16:creationId xmlns:a16="http://schemas.microsoft.com/office/drawing/2014/main" id="{3BF1619E-E779-1FB3-832E-79974FD17FC0}"/>
+                <a16:creationId xmlns:a16="http://schemas.microsoft.com/office/drawing/2014/main" id="{7824D867-7A06-EC2F-8DAA-770108B39F82}"/>
               </a:ext>
             </a:extLst>
           </p:cNvPr>
@@ -5151,7 +5151,7 @@
           <p:cNvPr id="3" name="テキスト ボックス 2">
             <a:extLst>
               <a:ext uri="{FF2B5EF4-FFF2-40B4-BE49-F238E27FC236}">
-                <a16:creationId xmlns:a16="http://schemas.microsoft.com/office/drawing/2014/main" id="{CEC4E289-FA26-F4B0-363D-2A53A7C5A0C0}"/>
+                <a16:creationId xmlns:a16="http://schemas.microsoft.com/office/drawing/2014/main" id="{EFA996BD-FCC1-A413-3905-DCE4078670AF}"/>
               </a:ext>
             </a:extLst>
           </p:cNvPr>
@@ -5191,7 +5191,7 @@
           <p:cNvPr id="4" name="テキスト ボックス 3">
             <a:extLst>
               <a:ext uri="{FF2B5EF4-FFF2-40B4-BE49-F238E27FC236}">
-                <a16:creationId xmlns:a16="http://schemas.microsoft.com/office/drawing/2014/main" id="{EF6FB395-CC0F-A53B-24C9-DC4557A6D8A5}"/>
+                <a16:creationId xmlns:a16="http://schemas.microsoft.com/office/drawing/2014/main" id="{C2EE8A29-1C0A-A96C-3670-3AC5D74623FC}"/>
               </a:ext>
             </a:extLst>
           </p:cNvPr>
@@ -5215,20 +5215,14 @@
           <a:lstStyle/>
           <a:p>
             <a:r>
-              <a:rPr kumimoji="1" lang="en-US" altLang="ja-JP" sz="2000">
+              <a:rPr kumimoji="1" lang="ja-JP" altLang="en-US" sz="2000">
                 <a:solidFill>
                   <a:srgbClr val="333333"/>
                 </a:solidFill>
                 <a:latin typeface="Arial" panose="020B0604020202020204" pitchFamily="34" charset="0"/>
               </a:rPr>
-              <a:t>Set confirmed custom domain</a:t>
-            </a:r>
-            <a:endParaRPr kumimoji="1" lang="ja-JP" altLang="en-US" sz="2000">
-              <a:solidFill>
-                <a:srgbClr val="333333"/>
-              </a:solidFill>
-              <a:latin typeface="Arial" panose="020B0604020202020204" pitchFamily="34" charset="0"/>
-            </a:endParaRPr>
+              <a:t>直近のコミットでは、実装の見直しと継続的な改善が行われました。</a:t>
+            </a:r>
           </a:p>
         </p:txBody>
       </p:sp>
@@ -5237,7 +5231,7 @@
           <p:cNvPr id="5" name="テキスト ボックス 4">
             <a:extLst>
               <a:ext uri="{FF2B5EF4-FFF2-40B4-BE49-F238E27FC236}">
-                <a16:creationId xmlns:a16="http://schemas.microsoft.com/office/drawing/2014/main" id="{6D1BA911-C0EA-2C87-D0B3-AD85EF21FA8A}"/>
+                <a16:creationId xmlns:a16="http://schemas.microsoft.com/office/drawing/2014/main" id="{B800AE78-B6A2-EF7B-0DEC-650553918AC6}"/>
               </a:ext>
             </a:extLst>
           </p:cNvPr>
@@ -5284,7 +5278,7 @@
             <a:hlinkClick r:id="" action="ppaction://media"/>
             <a:extLst>
               <a:ext uri="{FF2B5EF4-FFF2-40B4-BE49-F238E27FC236}">
-                <a16:creationId xmlns:a16="http://schemas.microsoft.com/office/drawing/2014/main" id="{AAD2CE15-9D06-07E1-73D2-ABD1D4AE19CE}"/>
+                <a16:creationId xmlns:a16="http://schemas.microsoft.com/office/drawing/2014/main" id="{0AC9501A-62D9-A3C7-27E6-869B7AAC30CF}"/>
               </a:ext>
             </a:extLst>
           </p:cNvPr>
@@ -5319,7 +5313,7 @@
     </p:spTree>
     <p:extLst>
       <p:ext uri="{BB962C8B-B14F-4D97-AF65-F5344CB8AC3E}">
-        <p14:creationId xmlns:p14="http://schemas.microsoft.com/office/powerpoint/2010/main" val="1091463779"/>
+        <p14:creationId xmlns:p14="http://schemas.microsoft.com/office/powerpoint/2010/main" val="4176171072"/>
       </p:ext>
     </p:extLst>
   </p:cSld>
@@ -5362,7 +5356,7 @@
                                   <p:childTnLst>
                                     <p:cmd type="call" cmd="playFrom(0.0)">
                                       <p:cBhvr>
-                                        <p:cTn id="6" dur="6451" fill="hold"/>
+                                        <p:cTn id="6" dur="6076" fill="hold"/>
                                         <p:tgtEl>
                                           <p:spTgt spid="6"/>
                                         </p:tgtEl>
@@ -5443,7 +5437,7 @@
           <p:cNvPr id="2" name="テキスト ボックス 1">
             <a:extLst>
               <a:ext uri="{FF2B5EF4-FFF2-40B4-BE49-F238E27FC236}">
-                <a16:creationId xmlns:a16="http://schemas.microsoft.com/office/drawing/2014/main" id="{D4F88B87-11B3-EA46-3379-7A1D9E9E774A}"/>
+                <a16:creationId xmlns:a16="http://schemas.microsoft.com/office/drawing/2014/main" id="{A0F19405-FB5D-2852-58AD-0AEE31C97B67}"/>
               </a:ext>
             </a:extLst>
           </p:cNvPr>
@@ -5489,7 +5483,7 @@
           <p:cNvPr id="3" name="テキスト ボックス 2">
             <a:extLst>
               <a:ext uri="{FF2B5EF4-FFF2-40B4-BE49-F238E27FC236}">
-                <a16:creationId xmlns:a16="http://schemas.microsoft.com/office/drawing/2014/main" id="{938A040C-ECA2-B34A-07CB-153492F1B202}"/>
+                <a16:creationId xmlns:a16="http://schemas.microsoft.com/office/drawing/2014/main" id="{C0FB088A-E8CA-AADA-4E15-D28859003947}"/>
               </a:ext>
             </a:extLst>
           </p:cNvPr>
@@ -5529,7 +5523,7 @@
           <p:cNvPr id="4" name="テキスト ボックス 3">
             <a:extLst>
               <a:ext uri="{FF2B5EF4-FFF2-40B4-BE49-F238E27FC236}">
-                <a16:creationId xmlns:a16="http://schemas.microsoft.com/office/drawing/2014/main" id="{666DD0FC-D4FA-3EBA-9AFF-A8296075ECEC}"/>
+                <a16:creationId xmlns:a16="http://schemas.microsoft.com/office/drawing/2014/main" id="{85645C0D-743A-CF58-55A6-B79E087B6463}"/>
               </a:ext>
             </a:extLst>
           </p:cNvPr>
@@ -5594,7 +5588,7 @@
           <p:cNvPr id="5" name="テキスト ボックス 4">
             <a:extLst>
               <a:ext uri="{FF2B5EF4-FFF2-40B4-BE49-F238E27FC236}">
-                <a16:creationId xmlns:a16="http://schemas.microsoft.com/office/drawing/2014/main" id="{954D3FE3-5AAA-DA81-EB13-1AFD9E3992AA}"/>
+                <a16:creationId xmlns:a16="http://schemas.microsoft.com/office/drawing/2014/main" id="{60C1F8C2-7059-571D-15F5-501A5511537D}"/>
               </a:ext>
             </a:extLst>
           </p:cNvPr>
@@ -5641,7 +5635,7 @@
             <a:hlinkClick r:id="" action="ppaction://media"/>
             <a:extLst>
               <a:ext uri="{FF2B5EF4-FFF2-40B4-BE49-F238E27FC236}">
-                <a16:creationId xmlns:a16="http://schemas.microsoft.com/office/drawing/2014/main" id="{213098A0-3753-87CF-2606-67700344D529}"/>
+                <a16:creationId xmlns:a16="http://schemas.microsoft.com/office/drawing/2014/main" id="{6C2A7C5B-6FCD-857F-2CA0-1DF9B27BD1CA}"/>
               </a:ext>
             </a:extLst>
           </p:cNvPr>
@@ -5676,7 +5670,7 @@
     </p:spTree>
     <p:extLst>
       <p:ext uri="{BB962C8B-B14F-4D97-AF65-F5344CB8AC3E}">
-        <p14:creationId xmlns:p14="http://schemas.microsoft.com/office/powerpoint/2010/main" val="1052383987"/>
+        <p14:creationId xmlns:p14="http://schemas.microsoft.com/office/powerpoint/2010/main" val="251625576"/>
       </p:ext>
     </p:extLst>
   </p:cSld>
